--- a/final/phone_accessories_team_presentation_updated.pptx
+++ b/final/phone_accessories_team_presentation_updated.pptx
@@ -113,23 +113,65 @@
       </a:defRPr>
     </a:lvl9pPr>
   </p:defaultTextStyle>
+  <p:extLst>
+    <p:ext uri="{EFAFB233-063F-42B5-8137-9DF3F51BA10A}">
+      <p15:sldGuideLst xmlns:p15="http://schemas.microsoft.com/office/powerpoint/2012/main"/>
+    </p:ext>
+  </p:extLst>
 </p:presentation>
+</file>
+
+<file path=ppt/revisionInfo.xml><?xml version="1.0" encoding="utf-8"?>
+<p1510:revInfo xmlns:a="http://schemas.openxmlformats.org/drawingml/2006/main" xmlns:r="http://schemas.openxmlformats.org/officeDocument/2006/relationships" xmlns:p1510="http://schemas.microsoft.com/office/powerpoint/2015/10/main">
+  <p1510:revLst>
+    <p1510:client id="{CED29C98-D874-4F0E-A3F4-36E7EF7CA3B5}" v="4" dt="2026-10-23T00:06:00.367"/>
+  </p1510:revLst>
+</p1510:revInfo>
 </file>
 
 <file path=ppt/changesInfos/changesInfo1.xml><?xml version="1.0" encoding="utf-8"?>
 <pc:chgInfo xmlns:a="http://schemas.openxmlformats.org/drawingml/2006/main" xmlns:r="http://schemas.openxmlformats.org/officeDocument/2006/relationships" xmlns:ac="http://schemas.microsoft.com/office/drawing/2013/main/command" xmlns:pc="http://schemas.microsoft.com/office/powerpoint/2013/main/command">
   <pc:docChgLst>
     <pc:chgData name="Nicolas Delfau" userId="919e110a-cec1-4398-b9fd-878aa5de24a3" providerId="ADAL" clId="{80A0C260-8201-414D-B64D-D50F13586782}"/>
-    <pc:docChg chg="delSld">
-      <pc:chgData name="Nicolas Delfau" userId="919e110a-cec1-4398-b9fd-878aa5de24a3" providerId="ADAL" clId="{80A0C260-8201-414D-B64D-D50F13586782}" dt="2026-10-23T00:05:13.737" v="0" actId="47"/>
+    <pc:docChg chg="addSld delSld modSld">
+      <pc:chgData name="Nicolas Delfau" userId="919e110a-cec1-4398-b9fd-878aa5de24a3" providerId="ADAL" clId="{80A0C260-8201-414D-B64D-D50F13586782}" dt="2026-10-23T00:06:00.352" v="89"/>
       <pc:docMkLst>
         <pc:docMk/>
       </pc:docMkLst>
+      <pc:sldChg chg="modSp mod">
+        <pc:chgData name="Nicolas Delfau" userId="919e110a-cec1-4398-b9fd-878aa5de24a3" providerId="ADAL" clId="{80A0C260-8201-414D-B64D-D50F13586782}" dt="2026-10-23T00:05:51.291" v="85" actId="20577"/>
+        <pc:sldMkLst>
+          <pc:docMk/>
+          <pc:sldMk cId="1528497734" sldId="256"/>
+        </pc:sldMkLst>
+        <pc:spChg chg="mod">
+          <ac:chgData name="Nicolas Delfau" userId="919e110a-cec1-4398-b9fd-878aa5de24a3" providerId="ADAL" clId="{80A0C260-8201-414D-B64D-D50F13586782}" dt="2026-10-23T00:05:51.291" v="85" actId="20577"/>
+          <ac:spMkLst>
+            <pc:docMk/>
+            <pc:sldMk cId="1528497734" sldId="256"/>
+            <ac:spMk id="3" creationId="{747C9682-D6A1-438D-97A7-1008D2D65CC2}"/>
+          </ac:spMkLst>
+        </pc:spChg>
+      </pc:sldChg>
       <pc:sldChg chg="del">
         <pc:chgData name="Nicolas Delfau" userId="919e110a-cec1-4398-b9fd-878aa5de24a3" providerId="ADAL" clId="{80A0C260-8201-414D-B64D-D50F13586782}" dt="2026-10-23T00:05:13.737" v="0" actId="47"/>
         <pc:sldMkLst>
           <pc:docMk/>
           <pc:sldMk cId="58456842" sldId="263"/>
+        </pc:sldMkLst>
+      </pc:sldChg>
+      <pc:sldChg chg="add del setBg">
+        <pc:chgData name="Nicolas Delfau" userId="919e110a-cec1-4398-b9fd-878aa5de24a3" providerId="ADAL" clId="{80A0C260-8201-414D-B64D-D50F13586782}" dt="2026-10-23T00:06:00.352" v="89"/>
+        <pc:sldMkLst>
+          <pc:docMk/>
+          <pc:sldMk cId="3315028093" sldId="263"/>
+        </pc:sldMkLst>
+      </pc:sldChg>
+      <pc:sldChg chg="add del setBg">
+        <pc:chgData name="Nicolas Delfau" userId="919e110a-cec1-4398-b9fd-878aa5de24a3" providerId="ADAL" clId="{80A0C260-8201-414D-B64D-D50F13586782}" dt="2026-10-23T00:05:57.940" v="87"/>
+        <pc:sldMkLst>
+          <pc:docMk/>
+          <pc:sldMk cId="4190080358" sldId="263"/>
         </pc:sldMkLst>
       </pc:sldChg>
     </pc:docChg>
@@ -5053,7 +5095,7 @@
               </a:defRPr>
             </a:pPr>
             <a:r>
-              <a:rPr sz="2175" b="0">
+              <a:rPr sz="2175" b="0" dirty="0">
                 <a:solidFill>
                   <a:srgbClr val="E2E8F0"/>
                 </a:solidFill>
@@ -5077,7 +5119,7 @@
               </a:defRPr>
             </a:pPr>
             <a:r>
-              <a:rPr sz="2175" b="0">
+              <a:rPr sz="2175" b="0" dirty="0">
                 <a:solidFill>
                   <a:srgbClr val="E2E8F0"/>
                 </a:solidFill>
@@ -5087,6 +5129,71 @@
               </a:rPr>
               <a:t>Customer evidence, financial target and first-month plan</a:t>
             </a:r>
+            <a:endParaRPr lang="en-US" sz="2175" b="0" dirty="0">
+              <a:solidFill>
+                <a:srgbClr val="E2E8F0"/>
+              </a:solidFill>
+              <a:latin typeface="Arial"/>
+              <a:ea typeface="Arial"/>
+              <a:cs typeface="Arial"/>
+            </a:endParaRPr>
+          </a:p>
+          <a:p>
+            <a:pPr>
+              <a:buNone/>
+              <a:defRPr sz="2175" b="0">
+                <a:solidFill>
+                  <a:srgbClr val="E2E8F0"/>
+                </a:solidFill>
+                <a:latin typeface="Arial"/>
+                <a:ea typeface="Arial"/>
+                <a:cs typeface="Arial"/>
+              </a:defRPr>
+            </a:pPr>
+            <a:endParaRPr lang="en-US" dirty="0"/>
+          </a:p>
+          <a:p>
+            <a:pPr>
+              <a:buNone/>
+              <a:defRPr sz="2175" b="0">
+                <a:solidFill>
+                  <a:srgbClr val="E2E8F0"/>
+                </a:solidFill>
+                <a:latin typeface="Arial"/>
+                <a:ea typeface="Arial"/>
+                <a:cs typeface="Arial"/>
+              </a:defRPr>
+            </a:pPr>
+            <a:r>
+              <a:rPr lang="en-US" sz="2175" b="0" dirty="0">
+                <a:solidFill>
+                  <a:srgbClr val="E2E8F0"/>
+                </a:solidFill>
+                <a:latin typeface="Arial"/>
+                <a:ea typeface="Arial"/>
+                <a:cs typeface="Arial"/>
+              </a:rPr>
+              <a:t>Robin Lecomte, Caroline Kilbane, Nicolas Delfau, Jasmine </a:t>
+            </a:r>
+            <a:r>
+              <a:rPr lang="en-US" sz="2175" b="0" dirty="0" err="1">
+                <a:solidFill>
+                  <a:srgbClr val="E2E8F0"/>
+                </a:solidFill>
+                <a:latin typeface="Arial"/>
+                <a:ea typeface="Arial"/>
+                <a:cs typeface="Arial"/>
+              </a:rPr>
+              <a:t>Ongole</a:t>
+            </a:r>
+            <a:endParaRPr sz="2175" b="0" dirty="0">
+              <a:solidFill>
+                <a:srgbClr val="E2E8F0"/>
+              </a:solidFill>
+              <a:latin typeface="Arial"/>
+              <a:ea typeface="Arial"/>
+              <a:cs typeface="Arial"/>
+            </a:endParaRPr>
           </a:p>
         </p:txBody>
       </p:sp>

--- a/final/phone_accessories_team_presentation_updated.pptx
+++ b/final/phone_accessories_team_presentation_updated.pptx
@@ -5,16 +5,17 @@
     <p:sldMasterId id="2147483648" r:id="rId1"/>
   </p:sldMasterIdLst>
   <p:notesMasterIdLst>
-    <p:notesMasterId r:id="rId9"/>
+    <p:notesMasterId r:id="rId10"/>
   </p:notesMasterIdLst>
   <p:sldIdLst>
     <p:sldId id="256" r:id="rId2"/>
-    <p:sldId id="257" r:id="rId3"/>
-    <p:sldId id="258" r:id="rId4"/>
-    <p:sldId id="259" r:id="rId5"/>
-    <p:sldId id="260" r:id="rId6"/>
-    <p:sldId id="261" r:id="rId7"/>
-    <p:sldId id="262" r:id="rId8"/>
+    <p:sldId id="263" r:id="rId3"/>
+    <p:sldId id="257" r:id="rId4"/>
+    <p:sldId id="258" r:id="rId5"/>
+    <p:sldId id="259" r:id="rId6"/>
+    <p:sldId id="260" r:id="rId7"/>
+    <p:sldId id="261" r:id="rId8"/>
+    <p:sldId id="262" r:id="rId9"/>
   </p:sldIdLst>
   <p:sldSz cx="12192000" cy="6858000"/>
   <p:notesSz cx="6858000" cy="9144000"/>
@@ -124,7 +125,7 @@
 <file path=ppt/revisionInfo.xml><?xml version="1.0" encoding="utf-8"?>
 <p1510:revInfo xmlns:a="http://schemas.openxmlformats.org/drawingml/2006/main" xmlns:r="http://schemas.openxmlformats.org/officeDocument/2006/relationships" xmlns:p1510="http://schemas.microsoft.com/office/powerpoint/2015/10/main">
   <p1510:revLst>
-    <p1510:client id="{CED29C98-D874-4F0E-A3F4-36E7EF7CA3B5}" v="4" dt="2026-10-23T00:06:00.367"/>
+    <p1510:client id="{CED29C98-D874-4F0E-A3F4-36E7EF7CA3B5}" v="5" dt="2026-10-23T00:07:12.780"/>
   </p1510:revLst>
 </p1510:revInfo>
 </file>
@@ -133,8 +134,8 @@
 <pc:chgInfo xmlns:a="http://schemas.openxmlformats.org/drawingml/2006/main" xmlns:r="http://schemas.openxmlformats.org/officeDocument/2006/relationships" xmlns:ac="http://schemas.microsoft.com/office/drawing/2013/main/command" xmlns:pc="http://schemas.microsoft.com/office/powerpoint/2013/main/command">
   <pc:docChgLst>
     <pc:chgData name="Nicolas Delfau" userId="919e110a-cec1-4398-b9fd-878aa5de24a3" providerId="ADAL" clId="{80A0C260-8201-414D-B64D-D50F13586782}"/>
-    <pc:docChg chg="addSld delSld modSld">
-      <pc:chgData name="Nicolas Delfau" userId="919e110a-cec1-4398-b9fd-878aa5de24a3" providerId="ADAL" clId="{80A0C260-8201-414D-B64D-D50F13586782}" dt="2026-10-23T00:06:00.352" v="89"/>
+    <pc:docChg chg="custSel addSld delSld modSld">
+      <pc:chgData name="Nicolas Delfau" userId="919e110a-cec1-4398-b9fd-878aa5de24a3" providerId="ADAL" clId="{80A0C260-8201-414D-B64D-D50F13586782}" dt="2026-10-23T00:07:49.833" v="131" actId="20577"/>
       <pc:docMkLst>
         <pc:docMk/>
       </pc:docMkLst>
@@ -159,6 +160,29 @@
           <pc:docMk/>
           <pc:sldMk cId="58456842" sldId="263"/>
         </pc:sldMkLst>
+      </pc:sldChg>
+      <pc:sldChg chg="delSp modSp add mod setBg">
+        <pc:chgData name="Nicolas Delfau" userId="919e110a-cec1-4398-b9fd-878aa5de24a3" providerId="ADAL" clId="{80A0C260-8201-414D-B64D-D50F13586782}" dt="2026-10-23T00:07:49.833" v="131" actId="20577"/>
+        <pc:sldMkLst>
+          <pc:docMk/>
+          <pc:sldMk cId="2179779410" sldId="263"/>
+        </pc:sldMkLst>
+        <pc:spChg chg="del">
+          <ac:chgData name="Nicolas Delfau" userId="919e110a-cec1-4398-b9fd-878aa5de24a3" providerId="ADAL" clId="{80A0C260-8201-414D-B64D-D50F13586782}" dt="2026-10-23T00:07:18.366" v="104" actId="478"/>
+          <ac:spMkLst>
+            <pc:docMk/>
+            <pc:sldMk cId="2179779410" sldId="263"/>
+            <ac:spMk id="8" creationId="{CE5D196A-F4FF-9EA8-EB16-B1F2AAD65368}"/>
+          </ac:spMkLst>
+        </pc:spChg>
+        <pc:spChg chg="mod">
+          <ac:chgData name="Nicolas Delfau" userId="919e110a-cec1-4398-b9fd-878aa5de24a3" providerId="ADAL" clId="{80A0C260-8201-414D-B64D-D50F13586782}" dt="2026-10-23T00:07:49.833" v="131" actId="20577"/>
+          <ac:spMkLst>
+            <pc:docMk/>
+            <pc:sldMk cId="2179779410" sldId="263"/>
+            <ac:spMk id="10" creationId="{1A0C53FD-C241-4558-965E-C425CEF37FA1}"/>
+          </ac:spMkLst>
+        </pc:spChg>
       </pc:sldChg>
       <pc:sldChg chg="add del setBg">
         <pc:chgData name="Nicolas Delfau" userId="919e110a-cec1-4398-b9fd-878aa5de24a3" providerId="ADAL" clId="{80A0C260-8201-414D-B64D-D50F13586782}" dt="2026-10-23T00:06:00.352" v="89"/>
@@ -635,7 +659,7 @@
                   <c:v>6695.56</c:v>
                 </c:pt>
                 <c:pt idx="2">
-                  <c:v>8216.1200000000008</c:v>
+                  <c:v>8216.12</c:v>
                 </c:pt>
                 <c:pt idx="3">
                   <c:v>10136.14</c:v>
@@ -644,7 +668,7 @@
                   <c:v>12256.7</c:v>
                 </c:pt>
                 <c:pt idx="5">
-                  <c:v>16902.259999999998</c:v>
+                  <c:v>16902.26</c:v>
                 </c:pt>
                 <c:pt idx="6">
                   <c:v>18822.82</c:v>
@@ -662,7 +686,7 @@
                   <c:v>29193.34</c:v>
                 </c:pt>
                 <c:pt idx="11">
-                  <c:v>30887.439999999999</c:v>
+                  <c:v>30887.44</c:v>
                 </c:pt>
                 <c:pt idx="12">
                   <c:v>32781.54</c:v>
@@ -671,7 +695,7 @@
                   <c:v>34475.1</c:v>
                 </c:pt>
                 <c:pt idx="14">
-                  <c:v>34657.040000000001</c:v>
+                  <c:v>34657.04</c:v>
                 </c:pt>
               </c:numCache>
             </c:numRef>
@@ -1321,6 +1345,76 @@
 </file>
 
 <file path=ppt/notesSlides/notesSlide2.xml><?xml version="1.0" encoding="utf-8"?>
+<p:notes xmlns:p="http://schemas.openxmlformats.org/presentationml/2006/main">
+  <p:cSld>
+    <p:spTree>
+      <p:nvGrpSpPr>
+        <p:cNvPr id="1" name=""/>
+        <p:cNvGrpSpPr/>
+        <p:nvPr/>
+      </p:nvGrpSpPr>
+      <p:grpSpPr>
+        <a:xfrm xmlns:a="http://schemas.openxmlformats.org/drawingml/2006/main"/>
+      </p:grpSpPr>
+      <p:sp>
+        <p:nvSpPr>
+          <p:cNvPr id="2" name="Slide Image Placeholder 1"/>
+          <p:cNvSpPr>
+            <a:spLocks xmlns:a="http://schemas.openxmlformats.org/drawingml/2006/main" noGrp="1"/>
+          </p:cNvSpPr>
+          <p:nvPr>
+            <p:ph type="sldImg" idx="0"/>
+          </p:nvPr>
+        </p:nvSpPr>
+        <p:spPr/>
+      </p:sp>
+      <p:sp>
+        <p:nvSpPr>
+          <p:cNvPr id="3" name="Notes Placeholder 2"/>
+          <p:cNvSpPr>
+            <a:spLocks xmlns:a="http://schemas.openxmlformats.org/drawingml/2006/main" noGrp="1"/>
+          </p:cNvSpPr>
+          <p:nvPr>
+            <p:ph type="body" idx="1"/>
+          </p:nvPr>
+        </p:nvSpPr>
+        <p:spPr/>
+        <p:txBody>
+          <a:bodyPr xmlns:a="http://schemas.openxmlformats.org/drawingml/2006/main"/>
+          <a:lstStyle xmlns:a="http://schemas.openxmlformats.org/drawingml/2006/main"/>
+          <a:p xmlns:a="http://schemas.openxmlformats.org/drawingml/2006/main">
+            <a:r>
+              <a:t>Sources: inputs/mall_facts.md (70 empty units of 100, 400-square-foot Unit 42, $20,000 available, no borrowing, June 1–August 31 2027 lease, rent $2,500/month, mandatory 10 AM–9 PM daily trading, 30% expected August corridor-traffic decline); roles/01_customer_analyst/customers.md on upstream/main 707b044 (evaluate phone cases, cables and grips at $18); roles/02_finance_analyst/finance.md and daily_projection.csv (1,926 sales at the $18 full-price assumption, approximately 21/day). The financial target is a required-sales projection, not verified demand. It excludes the proposed 20% referral coupon, giveaways and outdoor poster costs on slide 7; the campaign requires a revised forecast.</a:t>
+            </a:r>
+          </a:p>
+        </p:txBody>
+      </p:sp>
+      <p:sp>
+        <p:nvSpPr>
+          <p:cNvPr id="4" name="Slide Number Placeholder 3"/>
+          <p:cNvSpPr>
+            <a:spLocks xmlns:a="http://schemas.openxmlformats.org/drawingml/2006/main" noGrp="1"/>
+          </p:cNvSpPr>
+          <p:nvPr>
+            <p:ph type="sldNum" idx="5"/>
+          </p:nvPr>
+        </p:nvSpPr>
+        <p:spPr/>
+        <p:txBody>
+          <a:bodyPr xmlns:a="http://schemas.openxmlformats.org/drawingml/2006/main"/>
+          <a:lstStyle xmlns:a="http://schemas.openxmlformats.org/drawingml/2006/main"/>
+          <a:p xmlns:a="http://schemas.openxmlformats.org/drawingml/2006/main"/>
+        </p:txBody>
+      </p:sp>
+    </p:spTree>
+  </p:cSld>
+  <p:clrMapOvr>
+    <a:masterClrMapping xmlns:a="http://schemas.openxmlformats.org/drawingml/2006/main"/>
+  </p:clrMapOvr>
+</p:notes>
+</file>
+
+<file path=ppt/notesSlides/notesSlide3.xml><?xml version="1.0" encoding="utf-8"?>
 <p:notes xmlns:a="http://schemas.openxmlformats.org/drawingml/2006/main" xmlns:r="http://schemas.openxmlformats.org/officeDocument/2006/relationships" xmlns:p="http://schemas.openxmlformats.org/presentationml/2006/main">
   <p:cSld>
     <p:spTree>
@@ -1397,7 +1491,7 @@
 </p:notes>
 </file>
 
-<file path=ppt/notesSlides/notesSlide3.xml><?xml version="1.0" encoding="utf-8"?>
+<file path=ppt/notesSlides/notesSlide4.xml><?xml version="1.0" encoding="utf-8"?>
 <p:notes xmlns:a="http://schemas.openxmlformats.org/drawingml/2006/main" xmlns:r="http://schemas.openxmlformats.org/officeDocument/2006/relationships" xmlns:p="http://schemas.openxmlformats.org/presentationml/2006/main">
   <p:cSld>
     <p:spTree>
@@ -1474,7 +1568,7 @@
 </p:notes>
 </file>
 
-<file path=ppt/notesSlides/notesSlide4.xml><?xml version="1.0" encoding="utf-8"?>
+<file path=ppt/notesSlides/notesSlide5.xml><?xml version="1.0" encoding="utf-8"?>
 <p:notes xmlns:a="http://schemas.openxmlformats.org/drawingml/2006/main" xmlns:r="http://schemas.openxmlformats.org/officeDocument/2006/relationships" xmlns:p="http://schemas.openxmlformats.org/presentationml/2006/main">
   <p:cSld>
     <p:spTree>
@@ -1551,7 +1645,7 @@
 </p:notes>
 </file>
 
-<file path=ppt/notesSlides/notesSlide5.xml><?xml version="1.0" encoding="utf-8"?>
+<file path=ppt/notesSlides/notesSlide6.xml><?xml version="1.0" encoding="utf-8"?>
 <p:notes xmlns:a="http://schemas.openxmlformats.org/drawingml/2006/main" xmlns:r="http://schemas.openxmlformats.org/officeDocument/2006/relationships" xmlns:p="http://schemas.openxmlformats.org/presentationml/2006/main">
   <p:cSld>
     <p:spTree>
@@ -1628,7 +1722,7 @@
 </p:notes>
 </file>
 
-<file path=ppt/notesSlides/notesSlide6.xml><?xml version="1.0" encoding="utf-8"?>
+<file path=ppt/notesSlides/notesSlide7.xml><?xml version="1.0" encoding="utf-8"?>
 <p:notes xmlns:a="http://schemas.openxmlformats.org/drawingml/2006/main" xmlns:r="http://schemas.openxmlformats.org/officeDocument/2006/relationships" xmlns:p="http://schemas.openxmlformats.org/presentationml/2006/main">
   <p:cSld>
     <p:spTree>
@@ -1705,7 +1799,7 @@
 </p:notes>
 </file>
 
-<file path=ppt/notesSlides/notesSlide7.xml><?xml version="1.0" encoding="utf-8"?>
+<file path=ppt/notesSlides/notesSlide8.xml><?xml version="1.0" encoding="utf-8"?>
 <p:notes xmlns:a="http://schemas.openxmlformats.org/drawingml/2006/main" xmlns:r="http://schemas.openxmlformats.org/officeDocument/2006/relationships" xmlns:p="http://schemas.openxmlformats.org/presentationml/2006/main">
   <p:cSld>
     <p:spTree>
@@ -5369,6 +5463,1773 @@
 </file>
 
 <file path=ppt/slides/slide2.xml><?xml version="1.0" encoding="utf-8"?>
+<p:sld xmlns:p="http://schemas.openxmlformats.org/presentationml/2006/main">
+  <p:cSld>
+    <p:bg>
+      <p:bgPr>
+        <a:solidFill xmlns:a="http://schemas.openxmlformats.org/drawingml/2006/main">
+          <a:srgbClr val="FFFFFF"/>
+        </a:solidFill>
+      </p:bgPr>
+    </p:bg>
+    <p:spTree>
+      <p:nvGrpSpPr>
+        <p:cNvPr id="1" name=""/>
+        <p:cNvGrpSpPr/>
+        <p:nvPr/>
+      </p:nvGrpSpPr>
+      <p:grpSpPr>
+        <a:xfrm xmlns:a="http://schemas.openxmlformats.org/drawingml/2006/main"/>
+      </p:grpSpPr>
+      <p:sp>
+        <p:nvSpPr>
+          <p:cNvPr id="12" name="">
+            <a:extLst xmlns:a="http://schemas.openxmlformats.org/drawingml/2006/main">
+              <a:ext uri="{FF2B5EF4-FFF2-40B4-BE49-F238E27FC236}">
+                <a16:creationId xmlns:a16="http://schemas.microsoft.com/office/drawing/2014/main" id="{75B8D559-002D-481C-922F-B11B9366F6FD}"/>
+              </a:ext>
+            </a:extLst>
+          </p:cNvPr>
+          <p:cNvSpPr>
+            <a:spLocks xmlns:a="http://schemas.openxmlformats.org/drawingml/2006/main" noGrp="1"/>
+          </p:cNvSpPr>
+          <p:nvPr/>
+        </p:nvSpPr>
+        <p:spPr>
+          <a:xfrm xmlns:a="http://schemas.openxmlformats.org/drawingml/2006/main">
+            <a:off x="685800" y="457200"/>
+            <a:ext cx="10820400" cy="723900"/>
+          </a:xfrm>
+          <a:prstGeom xmlns:a="http://schemas.openxmlformats.org/drawingml/2006/main" prst="rect">
+            <a:avLst/>
+          </a:prstGeom>
+          <a:noFill xmlns:a="http://schemas.openxmlformats.org/drawingml/2006/main"/>
+          <a:ln xmlns:a="http://schemas.openxmlformats.org/drawingml/2006/main" w="0">
+            <a:noFill/>
+          </a:ln>
+        </p:spPr>
+        <p:txBody>
+          <a:bodyPr xmlns:a="http://schemas.openxmlformats.org/drawingml/2006/main" wrap="square" lIns="0" tIns="0" rIns="0" bIns="0" anchor="t">
+            <a:noAutofit/>
+          </a:bodyPr>
+          <a:lstStyle xmlns:a="http://schemas.openxmlformats.org/drawingml/2006/main">
+            <a:defPPr>
+              <a:defRPr sz="3150" b="1">
+                <a:solidFill>
+                  <a:srgbClr val="16324F"/>
+                </a:solidFill>
+                <a:latin typeface="Arial"/>
+                <a:ea typeface="Arial"/>
+                <a:cs typeface="Arial"/>
+              </a:defRPr>
+            </a:defPPr>
+            <a:lvl1pPr>
+              <a:defRPr sz="3150" b="1">
+                <a:solidFill>
+                  <a:srgbClr val="16324F"/>
+                </a:solidFill>
+                <a:latin typeface="Arial"/>
+                <a:ea typeface="Arial"/>
+                <a:cs typeface="Arial"/>
+              </a:defRPr>
+            </a:lvl1pPr>
+            <a:lvl2pPr>
+              <a:defRPr sz="3150" b="1">
+                <a:solidFill>
+                  <a:srgbClr val="16324F"/>
+                </a:solidFill>
+                <a:latin typeface="Arial"/>
+                <a:ea typeface="Arial"/>
+                <a:cs typeface="Arial"/>
+              </a:defRPr>
+            </a:lvl2pPr>
+            <a:lvl3pPr>
+              <a:defRPr sz="3150" b="1">
+                <a:solidFill>
+                  <a:srgbClr val="16324F"/>
+                </a:solidFill>
+                <a:latin typeface="Arial"/>
+                <a:ea typeface="Arial"/>
+                <a:cs typeface="Arial"/>
+              </a:defRPr>
+            </a:lvl3pPr>
+            <a:lvl4pPr>
+              <a:defRPr sz="3150" b="1">
+                <a:solidFill>
+                  <a:srgbClr val="16324F"/>
+                </a:solidFill>
+                <a:latin typeface="Arial"/>
+                <a:ea typeface="Arial"/>
+                <a:cs typeface="Arial"/>
+              </a:defRPr>
+            </a:lvl4pPr>
+            <a:lvl5pPr>
+              <a:defRPr sz="3150" b="1">
+                <a:solidFill>
+                  <a:srgbClr val="16324F"/>
+                </a:solidFill>
+                <a:latin typeface="Arial"/>
+                <a:ea typeface="Arial"/>
+                <a:cs typeface="Arial"/>
+              </a:defRPr>
+            </a:lvl5pPr>
+            <a:lvl6pPr>
+              <a:defRPr sz="3150" b="1">
+                <a:solidFill>
+                  <a:srgbClr val="16324F"/>
+                </a:solidFill>
+                <a:latin typeface="Arial"/>
+                <a:ea typeface="Arial"/>
+                <a:cs typeface="Arial"/>
+              </a:defRPr>
+            </a:lvl6pPr>
+            <a:lvl7pPr>
+              <a:defRPr sz="3150" b="1">
+                <a:solidFill>
+                  <a:srgbClr val="16324F"/>
+                </a:solidFill>
+                <a:latin typeface="Arial"/>
+                <a:ea typeface="Arial"/>
+                <a:cs typeface="Arial"/>
+              </a:defRPr>
+            </a:lvl7pPr>
+            <a:lvl8pPr>
+              <a:defRPr sz="3150" b="1">
+                <a:solidFill>
+                  <a:srgbClr val="16324F"/>
+                </a:solidFill>
+                <a:latin typeface="Arial"/>
+                <a:ea typeface="Arial"/>
+                <a:cs typeface="Arial"/>
+              </a:defRPr>
+            </a:lvl8pPr>
+            <a:lvl9pPr>
+              <a:defRPr sz="3150" b="1">
+                <a:solidFill>
+                  <a:srgbClr val="16324F"/>
+                </a:solidFill>
+                <a:latin typeface="Arial"/>
+                <a:ea typeface="Arial"/>
+                <a:cs typeface="Arial"/>
+              </a:defRPr>
+            </a:lvl9pPr>
+          </a:lstStyle>
+          <a:p xmlns:a="http://schemas.openxmlformats.org/drawingml/2006/main">
+            <a:pPr>
+              <a:defRPr sz="3150" b="1">
+                <a:solidFill>
+                  <a:srgbClr val="16324F"/>
+                </a:solidFill>
+                <a:latin typeface="Arial"/>
+                <a:ea typeface="Arial"/>
+                <a:cs typeface="Arial"/>
+              </a:defRPr>
+            </a:pPr>
+            <a:r>
+              <a:rPr sz="3150" b="1">
+                <a:solidFill>
+                  <a:srgbClr val="16324F"/>
+                </a:solidFill>
+                <a:latin typeface="Arial"/>
+                <a:ea typeface="Arial"/>
+                <a:cs typeface="Arial"/>
+              </a:rPr>
+              <a:t>Case overview</a:t>
+            </a:r>
+          </a:p>
+        </p:txBody>
+      </p:sp>
+      <p:sp>
+        <p:nvSpPr>
+          <p:cNvPr id="2" name="">
+            <a:extLst xmlns:a="http://schemas.openxmlformats.org/drawingml/2006/main">
+              <a:ext uri="{FF2B5EF4-FFF2-40B4-BE49-F238E27FC236}">
+                <a16:creationId xmlns:a16="http://schemas.microsoft.com/office/drawing/2014/main" id="{71461591-32C2-45EA-822D-4E8E93AF5460}"/>
+              </a:ext>
+            </a:extLst>
+          </p:cNvPr>
+          <p:cNvSpPr>
+            <a:spLocks xmlns:a="http://schemas.openxmlformats.org/drawingml/2006/main" noGrp="1"/>
+          </p:cNvSpPr>
+          <p:nvPr/>
+        </p:nvSpPr>
+        <p:spPr>
+          <a:xfrm xmlns:a="http://schemas.openxmlformats.org/drawingml/2006/main">
+            <a:off x="685800" y="1514475"/>
+            <a:ext cx="3429000" cy="400050"/>
+          </a:xfrm>
+          <a:prstGeom xmlns:a="http://schemas.openxmlformats.org/drawingml/2006/main" prst="rect">
+            <a:avLst/>
+          </a:prstGeom>
+          <a:noFill xmlns:a="http://schemas.openxmlformats.org/drawingml/2006/main"/>
+          <a:ln xmlns:a="http://schemas.openxmlformats.org/drawingml/2006/main" w="0">
+            <a:noFill/>
+          </a:ln>
+        </p:spPr>
+        <p:txBody>
+          <a:bodyPr xmlns:a="http://schemas.openxmlformats.org/drawingml/2006/main" wrap="square" lIns="0" tIns="0" rIns="0" bIns="0" anchor="t">
+            <a:noAutofit/>
+          </a:bodyPr>
+          <a:lstStyle xmlns:a="http://schemas.openxmlformats.org/drawingml/2006/main">
+            <a:defPPr>
+              <a:defRPr sz="2100" b="1">
+                <a:solidFill>
+                  <a:srgbClr val="16324F"/>
+                </a:solidFill>
+                <a:latin typeface="Arial"/>
+                <a:ea typeface="Arial"/>
+                <a:cs typeface="Arial"/>
+              </a:defRPr>
+            </a:defPPr>
+            <a:lvl1pPr>
+              <a:defRPr sz="2100" b="1">
+                <a:solidFill>
+                  <a:srgbClr val="16324F"/>
+                </a:solidFill>
+                <a:latin typeface="Arial"/>
+                <a:ea typeface="Arial"/>
+                <a:cs typeface="Arial"/>
+              </a:defRPr>
+            </a:lvl1pPr>
+            <a:lvl2pPr>
+              <a:defRPr sz="2100" b="1">
+                <a:solidFill>
+                  <a:srgbClr val="16324F"/>
+                </a:solidFill>
+                <a:latin typeface="Arial"/>
+                <a:ea typeface="Arial"/>
+                <a:cs typeface="Arial"/>
+              </a:defRPr>
+            </a:lvl2pPr>
+            <a:lvl3pPr>
+              <a:defRPr sz="2100" b="1">
+                <a:solidFill>
+                  <a:srgbClr val="16324F"/>
+                </a:solidFill>
+                <a:latin typeface="Arial"/>
+                <a:ea typeface="Arial"/>
+                <a:cs typeface="Arial"/>
+              </a:defRPr>
+            </a:lvl3pPr>
+            <a:lvl4pPr>
+              <a:defRPr sz="2100" b="1">
+                <a:solidFill>
+                  <a:srgbClr val="16324F"/>
+                </a:solidFill>
+                <a:latin typeface="Arial"/>
+                <a:ea typeface="Arial"/>
+                <a:cs typeface="Arial"/>
+              </a:defRPr>
+            </a:lvl4pPr>
+            <a:lvl5pPr>
+              <a:defRPr sz="2100" b="1">
+                <a:solidFill>
+                  <a:srgbClr val="16324F"/>
+                </a:solidFill>
+                <a:latin typeface="Arial"/>
+                <a:ea typeface="Arial"/>
+                <a:cs typeface="Arial"/>
+              </a:defRPr>
+            </a:lvl5pPr>
+            <a:lvl6pPr>
+              <a:defRPr sz="2100" b="1">
+                <a:solidFill>
+                  <a:srgbClr val="16324F"/>
+                </a:solidFill>
+                <a:latin typeface="Arial"/>
+                <a:ea typeface="Arial"/>
+                <a:cs typeface="Arial"/>
+              </a:defRPr>
+            </a:lvl6pPr>
+            <a:lvl7pPr>
+              <a:defRPr sz="2100" b="1">
+                <a:solidFill>
+                  <a:srgbClr val="16324F"/>
+                </a:solidFill>
+                <a:latin typeface="Arial"/>
+                <a:ea typeface="Arial"/>
+                <a:cs typeface="Arial"/>
+              </a:defRPr>
+            </a:lvl7pPr>
+            <a:lvl8pPr>
+              <a:defRPr sz="2100" b="1">
+                <a:solidFill>
+                  <a:srgbClr val="16324F"/>
+                </a:solidFill>
+                <a:latin typeface="Arial"/>
+                <a:ea typeface="Arial"/>
+                <a:cs typeface="Arial"/>
+              </a:defRPr>
+            </a:lvl8pPr>
+            <a:lvl9pPr>
+              <a:defRPr sz="2100" b="1">
+                <a:solidFill>
+                  <a:srgbClr val="16324F"/>
+                </a:solidFill>
+                <a:latin typeface="Arial"/>
+                <a:ea typeface="Arial"/>
+                <a:cs typeface="Arial"/>
+              </a:defRPr>
+            </a:lvl9pPr>
+          </a:lstStyle>
+          <a:p xmlns:a="http://schemas.openxmlformats.org/drawingml/2006/main">
+            <a:pPr>
+              <a:defRPr sz="2100" b="1">
+                <a:solidFill>
+                  <a:srgbClr val="16324F"/>
+                </a:solidFill>
+                <a:latin typeface="Arial"/>
+                <a:ea typeface="Arial"/>
+                <a:cs typeface="Arial"/>
+              </a:defRPr>
+            </a:pPr>
+            <a:r>
+              <a:rPr sz="2100" b="1">
+                <a:solidFill>
+                  <a:srgbClr val="16324F"/>
+                </a:solidFill>
+                <a:latin typeface="Arial"/>
+                <a:ea typeface="Arial"/>
+                <a:cs typeface="Arial"/>
+              </a:rPr>
+              <a:t>The opportunity</a:t>
+            </a:r>
+          </a:p>
+        </p:txBody>
+      </p:sp>
+      <p:sp>
+        <p:nvSpPr>
+          <p:cNvPr id="3" name="">
+            <a:extLst xmlns:a="http://schemas.openxmlformats.org/drawingml/2006/main">
+              <a:ext uri="{FF2B5EF4-FFF2-40B4-BE49-F238E27FC236}">
+                <a16:creationId xmlns:a16="http://schemas.microsoft.com/office/drawing/2014/main" id="{B79777A8-2175-4383-A565-177F99661144}"/>
+              </a:ext>
+            </a:extLst>
+          </p:cNvPr>
+          <p:cNvSpPr>
+            <a:spLocks xmlns:a="http://schemas.openxmlformats.org/drawingml/2006/main" noGrp="1"/>
+          </p:cNvSpPr>
+          <p:nvPr/>
+        </p:nvSpPr>
+        <p:spPr>
+          <a:xfrm xmlns:a="http://schemas.openxmlformats.org/drawingml/2006/main">
+            <a:off x="4286250" y="1514475"/>
+            <a:ext cx="7124700" cy="838200"/>
+          </a:xfrm>
+          <a:prstGeom xmlns:a="http://schemas.openxmlformats.org/drawingml/2006/main" prst="rect">
+            <a:avLst/>
+          </a:prstGeom>
+          <a:noFill xmlns:a="http://schemas.openxmlformats.org/drawingml/2006/main"/>
+          <a:ln xmlns:a="http://schemas.openxmlformats.org/drawingml/2006/main" w="0">
+            <a:noFill/>
+          </a:ln>
+        </p:spPr>
+        <p:txBody>
+          <a:bodyPr xmlns:a="http://schemas.openxmlformats.org/drawingml/2006/main" wrap="square" lIns="0" tIns="0" rIns="0" bIns="0" anchor="t">
+            <a:noAutofit/>
+          </a:bodyPr>
+          <a:lstStyle xmlns:a="http://schemas.openxmlformats.org/drawingml/2006/main">
+            <a:defPPr>
+              <a:defRPr sz="2025" b="0">
+                <a:solidFill>
+                  <a:srgbClr val="526477"/>
+                </a:solidFill>
+                <a:latin typeface="Arial"/>
+                <a:ea typeface="Arial"/>
+                <a:cs typeface="Arial"/>
+              </a:defRPr>
+            </a:defPPr>
+            <a:lvl1pPr>
+              <a:defRPr sz="2025" b="0">
+                <a:solidFill>
+                  <a:srgbClr val="526477"/>
+                </a:solidFill>
+                <a:latin typeface="Arial"/>
+                <a:ea typeface="Arial"/>
+                <a:cs typeface="Arial"/>
+              </a:defRPr>
+            </a:lvl1pPr>
+            <a:lvl2pPr>
+              <a:defRPr sz="2025" b="0">
+                <a:solidFill>
+                  <a:srgbClr val="526477"/>
+                </a:solidFill>
+                <a:latin typeface="Arial"/>
+                <a:ea typeface="Arial"/>
+                <a:cs typeface="Arial"/>
+              </a:defRPr>
+            </a:lvl2pPr>
+            <a:lvl3pPr>
+              <a:defRPr sz="2025" b="0">
+                <a:solidFill>
+                  <a:srgbClr val="526477"/>
+                </a:solidFill>
+                <a:latin typeface="Arial"/>
+                <a:ea typeface="Arial"/>
+                <a:cs typeface="Arial"/>
+              </a:defRPr>
+            </a:lvl3pPr>
+            <a:lvl4pPr>
+              <a:defRPr sz="2025" b="0">
+                <a:solidFill>
+                  <a:srgbClr val="526477"/>
+                </a:solidFill>
+                <a:latin typeface="Arial"/>
+                <a:ea typeface="Arial"/>
+                <a:cs typeface="Arial"/>
+              </a:defRPr>
+            </a:lvl4pPr>
+            <a:lvl5pPr>
+              <a:defRPr sz="2025" b="0">
+                <a:solidFill>
+                  <a:srgbClr val="526477"/>
+                </a:solidFill>
+                <a:latin typeface="Arial"/>
+                <a:ea typeface="Arial"/>
+                <a:cs typeface="Arial"/>
+              </a:defRPr>
+            </a:lvl5pPr>
+            <a:lvl6pPr>
+              <a:defRPr sz="2025" b="0">
+                <a:solidFill>
+                  <a:srgbClr val="526477"/>
+                </a:solidFill>
+                <a:latin typeface="Arial"/>
+                <a:ea typeface="Arial"/>
+                <a:cs typeface="Arial"/>
+              </a:defRPr>
+            </a:lvl6pPr>
+            <a:lvl7pPr>
+              <a:defRPr sz="2025" b="0">
+                <a:solidFill>
+                  <a:srgbClr val="526477"/>
+                </a:solidFill>
+                <a:latin typeface="Arial"/>
+                <a:ea typeface="Arial"/>
+                <a:cs typeface="Arial"/>
+              </a:defRPr>
+            </a:lvl7pPr>
+            <a:lvl8pPr>
+              <a:defRPr sz="2025" b="0">
+                <a:solidFill>
+                  <a:srgbClr val="526477"/>
+                </a:solidFill>
+                <a:latin typeface="Arial"/>
+                <a:ea typeface="Arial"/>
+                <a:cs typeface="Arial"/>
+              </a:defRPr>
+            </a:lvl8pPr>
+            <a:lvl9pPr>
+              <a:defRPr sz="2025" b="0">
+                <a:solidFill>
+                  <a:srgbClr val="526477"/>
+                </a:solidFill>
+                <a:latin typeface="Arial"/>
+                <a:ea typeface="Arial"/>
+                <a:cs typeface="Arial"/>
+              </a:defRPr>
+            </a:lvl9pPr>
+          </a:lstStyle>
+          <a:p xmlns:a="http://schemas.openxmlformats.org/drawingml/2006/main">
+            <a:pPr>
+              <a:defRPr sz="2025" b="0">
+                <a:solidFill>
+                  <a:srgbClr val="526477"/>
+                </a:solidFill>
+                <a:latin typeface="Arial"/>
+                <a:ea typeface="Arial"/>
+                <a:cs typeface="Arial"/>
+              </a:defRPr>
+            </a:pPr>
+            <a:r>
+              <a:rPr sz="2025" b="0">
+                <a:solidFill>
+                  <a:srgbClr val="526477"/>
+                </a:solidFill>
+                <a:latin typeface="Arial"/>
+                <a:ea typeface="Arial"/>
+                <a:cs typeface="Arial"/>
+              </a:rPr>
+              <a:t>Maple Mall is 70% empty. Unit 42 offers 400 square feet beside the central court.</a:t>
+            </a:r>
+          </a:p>
+        </p:txBody>
+      </p:sp>
+      <p:sp>
+        <p:nvSpPr>
+          <p:cNvPr id="4" name="">
+            <a:extLst xmlns:a="http://schemas.openxmlformats.org/drawingml/2006/main">
+              <a:ext uri="{FF2B5EF4-FFF2-40B4-BE49-F238E27FC236}">
+                <a16:creationId xmlns:a16="http://schemas.microsoft.com/office/drawing/2014/main" id="{7374BB6B-2C2F-44F6-AA09-A4A61959CCF3}"/>
+              </a:ext>
+            </a:extLst>
+          </p:cNvPr>
+          <p:cNvSpPr>
+            <a:spLocks xmlns:a="http://schemas.openxmlformats.org/drawingml/2006/main" noGrp="1"/>
+          </p:cNvSpPr>
+          <p:nvPr/>
+        </p:nvSpPr>
+        <p:spPr>
+          <a:xfrm xmlns:a="http://schemas.openxmlformats.org/drawingml/2006/main">
+            <a:off x="685800" y="2638425"/>
+            <a:ext cx="3429000" cy="400050"/>
+          </a:xfrm>
+          <a:prstGeom xmlns:a="http://schemas.openxmlformats.org/drawingml/2006/main" prst="rect">
+            <a:avLst/>
+          </a:prstGeom>
+          <a:noFill xmlns:a="http://schemas.openxmlformats.org/drawingml/2006/main"/>
+          <a:ln xmlns:a="http://schemas.openxmlformats.org/drawingml/2006/main" w="0">
+            <a:noFill/>
+          </a:ln>
+        </p:spPr>
+        <p:txBody>
+          <a:bodyPr xmlns:a="http://schemas.openxmlformats.org/drawingml/2006/main" wrap="square" lIns="0" tIns="0" rIns="0" bIns="0" anchor="t">
+            <a:noAutofit/>
+          </a:bodyPr>
+          <a:lstStyle xmlns:a="http://schemas.openxmlformats.org/drawingml/2006/main">
+            <a:defPPr>
+              <a:defRPr sz="2100" b="1">
+                <a:solidFill>
+                  <a:srgbClr val="16324F"/>
+                </a:solidFill>
+                <a:latin typeface="Arial"/>
+                <a:ea typeface="Arial"/>
+                <a:cs typeface="Arial"/>
+              </a:defRPr>
+            </a:defPPr>
+            <a:lvl1pPr>
+              <a:defRPr sz="2100" b="1">
+                <a:solidFill>
+                  <a:srgbClr val="16324F"/>
+                </a:solidFill>
+                <a:latin typeface="Arial"/>
+                <a:ea typeface="Arial"/>
+                <a:cs typeface="Arial"/>
+              </a:defRPr>
+            </a:lvl1pPr>
+            <a:lvl2pPr>
+              <a:defRPr sz="2100" b="1">
+                <a:solidFill>
+                  <a:srgbClr val="16324F"/>
+                </a:solidFill>
+                <a:latin typeface="Arial"/>
+                <a:ea typeface="Arial"/>
+                <a:cs typeface="Arial"/>
+              </a:defRPr>
+            </a:lvl2pPr>
+            <a:lvl3pPr>
+              <a:defRPr sz="2100" b="1">
+                <a:solidFill>
+                  <a:srgbClr val="16324F"/>
+                </a:solidFill>
+                <a:latin typeface="Arial"/>
+                <a:ea typeface="Arial"/>
+                <a:cs typeface="Arial"/>
+              </a:defRPr>
+            </a:lvl3pPr>
+            <a:lvl4pPr>
+              <a:defRPr sz="2100" b="1">
+                <a:solidFill>
+                  <a:srgbClr val="16324F"/>
+                </a:solidFill>
+                <a:latin typeface="Arial"/>
+                <a:ea typeface="Arial"/>
+                <a:cs typeface="Arial"/>
+              </a:defRPr>
+            </a:lvl4pPr>
+            <a:lvl5pPr>
+              <a:defRPr sz="2100" b="1">
+                <a:solidFill>
+                  <a:srgbClr val="16324F"/>
+                </a:solidFill>
+                <a:latin typeface="Arial"/>
+                <a:ea typeface="Arial"/>
+                <a:cs typeface="Arial"/>
+              </a:defRPr>
+            </a:lvl5pPr>
+            <a:lvl6pPr>
+              <a:defRPr sz="2100" b="1">
+                <a:solidFill>
+                  <a:srgbClr val="16324F"/>
+                </a:solidFill>
+                <a:latin typeface="Arial"/>
+                <a:ea typeface="Arial"/>
+                <a:cs typeface="Arial"/>
+              </a:defRPr>
+            </a:lvl6pPr>
+            <a:lvl7pPr>
+              <a:defRPr sz="2100" b="1">
+                <a:solidFill>
+                  <a:srgbClr val="16324F"/>
+                </a:solidFill>
+                <a:latin typeface="Arial"/>
+                <a:ea typeface="Arial"/>
+                <a:cs typeface="Arial"/>
+              </a:defRPr>
+            </a:lvl7pPr>
+            <a:lvl8pPr>
+              <a:defRPr sz="2100" b="1">
+                <a:solidFill>
+                  <a:srgbClr val="16324F"/>
+                </a:solidFill>
+                <a:latin typeface="Arial"/>
+                <a:ea typeface="Arial"/>
+                <a:cs typeface="Arial"/>
+              </a:defRPr>
+            </a:lvl8pPr>
+            <a:lvl9pPr>
+              <a:defRPr sz="2100" b="1">
+                <a:solidFill>
+                  <a:srgbClr val="16324F"/>
+                </a:solidFill>
+                <a:latin typeface="Arial"/>
+                <a:ea typeface="Arial"/>
+                <a:cs typeface="Arial"/>
+              </a:defRPr>
+            </a:lvl9pPr>
+          </a:lstStyle>
+          <a:p xmlns:a="http://schemas.openxmlformats.org/drawingml/2006/main">
+            <a:pPr>
+              <a:defRPr sz="2100" b="1">
+                <a:solidFill>
+                  <a:srgbClr val="16324F"/>
+                </a:solidFill>
+                <a:latin typeface="Arial"/>
+                <a:ea typeface="Arial"/>
+                <a:cs typeface="Arial"/>
+              </a:defRPr>
+            </a:pPr>
+            <a:r>
+              <a:rPr sz="2100" b="1">
+                <a:solidFill>
+                  <a:srgbClr val="16324F"/>
+                </a:solidFill>
+                <a:latin typeface="Arial"/>
+                <a:ea typeface="Arial"/>
+                <a:cs typeface="Arial"/>
+              </a:rPr>
+              <a:t>The proposed business</a:t>
+            </a:r>
+          </a:p>
+        </p:txBody>
+      </p:sp>
+      <p:sp>
+        <p:nvSpPr>
+          <p:cNvPr id="5" name="">
+            <a:extLst xmlns:a="http://schemas.openxmlformats.org/drawingml/2006/main">
+              <a:ext uri="{FF2B5EF4-FFF2-40B4-BE49-F238E27FC236}">
+                <a16:creationId xmlns:a16="http://schemas.microsoft.com/office/drawing/2014/main" id="{F302E069-9D36-4575-ACFD-1B1D3A4C115F}"/>
+              </a:ext>
+            </a:extLst>
+          </p:cNvPr>
+          <p:cNvSpPr>
+            <a:spLocks xmlns:a="http://schemas.openxmlformats.org/drawingml/2006/main" noGrp="1"/>
+          </p:cNvSpPr>
+          <p:nvPr/>
+        </p:nvSpPr>
+        <p:spPr>
+          <a:xfrm xmlns:a="http://schemas.openxmlformats.org/drawingml/2006/main">
+            <a:off x="4286250" y="2638425"/>
+            <a:ext cx="7124700" cy="838200"/>
+          </a:xfrm>
+          <a:prstGeom xmlns:a="http://schemas.openxmlformats.org/drawingml/2006/main" prst="rect">
+            <a:avLst/>
+          </a:prstGeom>
+          <a:noFill xmlns:a="http://schemas.openxmlformats.org/drawingml/2006/main"/>
+          <a:ln xmlns:a="http://schemas.openxmlformats.org/drawingml/2006/main" w="0">
+            <a:noFill/>
+          </a:ln>
+        </p:spPr>
+        <p:txBody>
+          <a:bodyPr xmlns:a="http://schemas.openxmlformats.org/drawingml/2006/main" wrap="square" lIns="0" tIns="0" rIns="0" bIns="0" anchor="t">
+            <a:noAutofit/>
+          </a:bodyPr>
+          <a:lstStyle xmlns:a="http://schemas.openxmlformats.org/drawingml/2006/main">
+            <a:defPPr>
+              <a:defRPr sz="2025" b="0">
+                <a:solidFill>
+                  <a:srgbClr val="526477"/>
+                </a:solidFill>
+                <a:latin typeface="Arial"/>
+                <a:ea typeface="Arial"/>
+                <a:cs typeface="Arial"/>
+              </a:defRPr>
+            </a:defPPr>
+            <a:lvl1pPr>
+              <a:defRPr sz="2025" b="0">
+                <a:solidFill>
+                  <a:srgbClr val="526477"/>
+                </a:solidFill>
+                <a:latin typeface="Arial"/>
+                <a:ea typeface="Arial"/>
+                <a:cs typeface="Arial"/>
+              </a:defRPr>
+            </a:lvl1pPr>
+            <a:lvl2pPr>
+              <a:defRPr sz="2025" b="0">
+                <a:solidFill>
+                  <a:srgbClr val="526477"/>
+                </a:solidFill>
+                <a:latin typeface="Arial"/>
+                <a:ea typeface="Arial"/>
+                <a:cs typeface="Arial"/>
+              </a:defRPr>
+            </a:lvl2pPr>
+            <a:lvl3pPr>
+              <a:defRPr sz="2025" b="0">
+                <a:solidFill>
+                  <a:srgbClr val="526477"/>
+                </a:solidFill>
+                <a:latin typeface="Arial"/>
+                <a:ea typeface="Arial"/>
+                <a:cs typeface="Arial"/>
+              </a:defRPr>
+            </a:lvl3pPr>
+            <a:lvl4pPr>
+              <a:defRPr sz="2025" b="0">
+                <a:solidFill>
+                  <a:srgbClr val="526477"/>
+                </a:solidFill>
+                <a:latin typeface="Arial"/>
+                <a:ea typeface="Arial"/>
+                <a:cs typeface="Arial"/>
+              </a:defRPr>
+            </a:lvl4pPr>
+            <a:lvl5pPr>
+              <a:defRPr sz="2025" b="0">
+                <a:solidFill>
+                  <a:srgbClr val="526477"/>
+                </a:solidFill>
+                <a:latin typeface="Arial"/>
+                <a:ea typeface="Arial"/>
+                <a:cs typeface="Arial"/>
+              </a:defRPr>
+            </a:lvl5pPr>
+            <a:lvl6pPr>
+              <a:defRPr sz="2025" b="0">
+                <a:solidFill>
+                  <a:srgbClr val="526477"/>
+                </a:solidFill>
+                <a:latin typeface="Arial"/>
+                <a:ea typeface="Arial"/>
+                <a:cs typeface="Arial"/>
+              </a:defRPr>
+            </a:lvl6pPr>
+            <a:lvl7pPr>
+              <a:defRPr sz="2025" b="0">
+                <a:solidFill>
+                  <a:srgbClr val="526477"/>
+                </a:solidFill>
+                <a:latin typeface="Arial"/>
+                <a:ea typeface="Arial"/>
+                <a:cs typeface="Arial"/>
+              </a:defRPr>
+            </a:lvl7pPr>
+            <a:lvl8pPr>
+              <a:defRPr sz="2025" b="0">
+                <a:solidFill>
+                  <a:srgbClr val="526477"/>
+                </a:solidFill>
+                <a:latin typeface="Arial"/>
+                <a:ea typeface="Arial"/>
+                <a:cs typeface="Arial"/>
+              </a:defRPr>
+            </a:lvl8pPr>
+            <a:lvl9pPr>
+              <a:defRPr sz="2025" b="0">
+                <a:solidFill>
+                  <a:srgbClr val="526477"/>
+                </a:solidFill>
+                <a:latin typeface="Arial"/>
+                <a:ea typeface="Arial"/>
+                <a:cs typeface="Arial"/>
+              </a:defRPr>
+            </a:lvl9pPr>
+          </a:lstStyle>
+          <a:p xmlns:a="http://schemas.openxmlformats.org/drawingml/2006/main">
+            <a:pPr>
+              <a:defRPr sz="2025" b="0">
+                <a:solidFill>
+                  <a:srgbClr val="526477"/>
+                </a:solidFill>
+                <a:latin typeface="Arial"/>
+                <a:ea typeface="Arial"/>
+                <a:cs typeface="Arial"/>
+              </a:defRPr>
+            </a:pPr>
+            <a:r>
+              <a:rPr sz="2025" b="0">
+                <a:solidFill>
+                  <a:srgbClr val="526477"/>
+                </a:solidFill>
+                <a:latin typeface="Arial"/>
+                <a:ea typeface="Arial"/>
+                <a:cs typeface="Arial"/>
+              </a:rPr>
+              <a:t>A phone accessories pop-up selling cases, cables and grips at an initial $18 per item.</a:t>
+            </a:r>
+          </a:p>
+        </p:txBody>
+      </p:sp>
+      <p:sp>
+        <p:nvSpPr>
+          <p:cNvPr id="6" name="">
+            <a:extLst xmlns:a="http://schemas.openxmlformats.org/drawingml/2006/main">
+              <a:ext uri="{FF2B5EF4-FFF2-40B4-BE49-F238E27FC236}">
+                <a16:creationId xmlns:a16="http://schemas.microsoft.com/office/drawing/2014/main" id="{54882BC8-18F7-4993-A7DD-F908661B351F}"/>
+              </a:ext>
+            </a:extLst>
+          </p:cNvPr>
+          <p:cNvSpPr>
+            <a:spLocks xmlns:a="http://schemas.openxmlformats.org/drawingml/2006/main" noGrp="1"/>
+          </p:cNvSpPr>
+          <p:nvPr/>
+        </p:nvSpPr>
+        <p:spPr>
+          <a:xfrm xmlns:a="http://schemas.openxmlformats.org/drawingml/2006/main">
+            <a:off x="685800" y="3762375"/>
+            <a:ext cx="3429000" cy="400050"/>
+          </a:xfrm>
+          <a:prstGeom xmlns:a="http://schemas.openxmlformats.org/drawingml/2006/main" prst="rect">
+            <a:avLst/>
+          </a:prstGeom>
+          <a:noFill xmlns:a="http://schemas.openxmlformats.org/drawingml/2006/main"/>
+          <a:ln xmlns:a="http://schemas.openxmlformats.org/drawingml/2006/main" w="0">
+            <a:noFill/>
+          </a:ln>
+        </p:spPr>
+        <p:txBody>
+          <a:bodyPr xmlns:a="http://schemas.openxmlformats.org/drawingml/2006/main" wrap="square" lIns="0" tIns="0" rIns="0" bIns="0" anchor="t">
+            <a:noAutofit/>
+          </a:bodyPr>
+          <a:lstStyle xmlns:a="http://schemas.openxmlformats.org/drawingml/2006/main">
+            <a:defPPr>
+              <a:defRPr sz="2100" b="1">
+                <a:solidFill>
+                  <a:srgbClr val="16324F"/>
+                </a:solidFill>
+                <a:latin typeface="Arial"/>
+                <a:ea typeface="Arial"/>
+                <a:cs typeface="Arial"/>
+              </a:defRPr>
+            </a:defPPr>
+            <a:lvl1pPr>
+              <a:defRPr sz="2100" b="1">
+                <a:solidFill>
+                  <a:srgbClr val="16324F"/>
+                </a:solidFill>
+                <a:latin typeface="Arial"/>
+                <a:ea typeface="Arial"/>
+                <a:cs typeface="Arial"/>
+              </a:defRPr>
+            </a:lvl1pPr>
+            <a:lvl2pPr>
+              <a:defRPr sz="2100" b="1">
+                <a:solidFill>
+                  <a:srgbClr val="16324F"/>
+                </a:solidFill>
+                <a:latin typeface="Arial"/>
+                <a:ea typeface="Arial"/>
+                <a:cs typeface="Arial"/>
+              </a:defRPr>
+            </a:lvl2pPr>
+            <a:lvl3pPr>
+              <a:defRPr sz="2100" b="1">
+                <a:solidFill>
+                  <a:srgbClr val="16324F"/>
+                </a:solidFill>
+                <a:latin typeface="Arial"/>
+                <a:ea typeface="Arial"/>
+                <a:cs typeface="Arial"/>
+              </a:defRPr>
+            </a:lvl3pPr>
+            <a:lvl4pPr>
+              <a:defRPr sz="2100" b="1">
+                <a:solidFill>
+                  <a:srgbClr val="16324F"/>
+                </a:solidFill>
+                <a:latin typeface="Arial"/>
+                <a:ea typeface="Arial"/>
+                <a:cs typeface="Arial"/>
+              </a:defRPr>
+            </a:lvl4pPr>
+            <a:lvl5pPr>
+              <a:defRPr sz="2100" b="1">
+                <a:solidFill>
+                  <a:srgbClr val="16324F"/>
+                </a:solidFill>
+                <a:latin typeface="Arial"/>
+                <a:ea typeface="Arial"/>
+                <a:cs typeface="Arial"/>
+              </a:defRPr>
+            </a:lvl5pPr>
+            <a:lvl6pPr>
+              <a:defRPr sz="2100" b="1">
+                <a:solidFill>
+                  <a:srgbClr val="16324F"/>
+                </a:solidFill>
+                <a:latin typeface="Arial"/>
+                <a:ea typeface="Arial"/>
+                <a:cs typeface="Arial"/>
+              </a:defRPr>
+            </a:lvl6pPr>
+            <a:lvl7pPr>
+              <a:defRPr sz="2100" b="1">
+                <a:solidFill>
+                  <a:srgbClr val="16324F"/>
+                </a:solidFill>
+                <a:latin typeface="Arial"/>
+                <a:ea typeface="Arial"/>
+                <a:cs typeface="Arial"/>
+              </a:defRPr>
+            </a:lvl7pPr>
+            <a:lvl8pPr>
+              <a:defRPr sz="2100" b="1">
+                <a:solidFill>
+                  <a:srgbClr val="16324F"/>
+                </a:solidFill>
+                <a:latin typeface="Arial"/>
+                <a:ea typeface="Arial"/>
+                <a:cs typeface="Arial"/>
+              </a:defRPr>
+            </a:lvl8pPr>
+            <a:lvl9pPr>
+              <a:defRPr sz="2100" b="1">
+                <a:solidFill>
+                  <a:srgbClr val="16324F"/>
+                </a:solidFill>
+                <a:latin typeface="Arial"/>
+                <a:ea typeface="Arial"/>
+                <a:cs typeface="Arial"/>
+              </a:defRPr>
+            </a:lvl9pPr>
+          </a:lstStyle>
+          <a:p xmlns:a="http://schemas.openxmlformats.org/drawingml/2006/main">
+            <a:pPr>
+              <a:defRPr sz="2100" b="1">
+                <a:solidFill>
+                  <a:srgbClr val="16324F"/>
+                </a:solidFill>
+                <a:latin typeface="Arial"/>
+                <a:ea typeface="Arial"/>
+                <a:cs typeface="Arial"/>
+              </a:defRPr>
+            </a:pPr>
+            <a:r>
+              <a:rPr sz="2100" b="1">
+                <a:solidFill>
+                  <a:srgbClr val="16324F"/>
+                </a:solidFill>
+                <a:latin typeface="Arial"/>
+                <a:ea typeface="Arial"/>
+                <a:cs typeface="Arial"/>
+              </a:rPr>
+              <a:t>The resources and timeline</a:t>
+            </a:r>
+          </a:p>
+        </p:txBody>
+      </p:sp>
+      <p:sp>
+        <p:nvSpPr>
+          <p:cNvPr id="7" name="">
+            <a:extLst xmlns:a="http://schemas.openxmlformats.org/drawingml/2006/main">
+              <a:ext uri="{FF2B5EF4-FFF2-40B4-BE49-F238E27FC236}">
+                <a16:creationId xmlns:a16="http://schemas.microsoft.com/office/drawing/2014/main" id="{A567F9DE-EED4-4CD7-A66F-D666B022B41B}"/>
+              </a:ext>
+            </a:extLst>
+          </p:cNvPr>
+          <p:cNvSpPr>
+            <a:spLocks xmlns:a="http://schemas.openxmlformats.org/drawingml/2006/main" noGrp="1"/>
+          </p:cNvSpPr>
+          <p:nvPr/>
+        </p:nvSpPr>
+        <p:spPr>
+          <a:xfrm xmlns:a="http://schemas.openxmlformats.org/drawingml/2006/main">
+            <a:off x="4286250" y="3762375"/>
+            <a:ext cx="7124700" cy="838200"/>
+          </a:xfrm>
+          <a:prstGeom xmlns:a="http://schemas.openxmlformats.org/drawingml/2006/main" prst="rect">
+            <a:avLst/>
+          </a:prstGeom>
+          <a:noFill xmlns:a="http://schemas.openxmlformats.org/drawingml/2006/main"/>
+          <a:ln xmlns:a="http://schemas.openxmlformats.org/drawingml/2006/main" w="0">
+            <a:noFill/>
+          </a:ln>
+        </p:spPr>
+        <p:txBody>
+          <a:bodyPr xmlns:a="http://schemas.openxmlformats.org/drawingml/2006/main" wrap="square" lIns="0" tIns="0" rIns="0" bIns="0" anchor="t">
+            <a:noAutofit/>
+          </a:bodyPr>
+          <a:lstStyle xmlns:a="http://schemas.openxmlformats.org/drawingml/2006/main">
+            <a:defPPr>
+              <a:defRPr sz="2025" b="0">
+                <a:solidFill>
+                  <a:srgbClr val="526477"/>
+                </a:solidFill>
+                <a:latin typeface="Arial"/>
+                <a:ea typeface="Arial"/>
+                <a:cs typeface="Arial"/>
+              </a:defRPr>
+            </a:defPPr>
+            <a:lvl1pPr>
+              <a:defRPr sz="2025" b="0">
+                <a:solidFill>
+                  <a:srgbClr val="526477"/>
+                </a:solidFill>
+                <a:latin typeface="Arial"/>
+                <a:ea typeface="Arial"/>
+                <a:cs typeface="Arial"/>
+              </a:defRPr>
+            </a:lvl1pPr>
+            <a:lvl2pPr>
+              <a:defRPr sz="2025" b="0">
+                <a:solidFill>
+                  <a:srgbClr val="526477"/>
+                </a:solidFill>
+                <a:latin typeface="Arial"/>
+                <a:ea typeface="Arial"/>
+                <a:cs typeface="Arial"/>
+              </a:defRPr>
+            </a:lvl2pPr>
+            <a:lvl3pPr>
+              <a:defRPr sz="2025" b="0">
+                <a:solidFill>
+                  <a:srgbClr val="526477"/>
+                </a:solidFill>
+                <a:latin typeface="Arial"/>
+                <a:ea typeface="Arial"/>
+                <a:cs typeface="Arial"/>
+              </a:defRPr>
+            </a:lvl3pPr>
+            <a:lvl4pPr>
+              <a:defRPr sz="2025" b="0">
+                <a:solidFill>
+                  <a:srgbClr val="526477"/>
+                </a:solidFill>
+                <a:latin typeface="Arial"/>
+                <a:ea typeface="Arial"/>
+                <a:cs typeface="Arial"/>
+              </a:defRPr>
+            </a:lvl4pPr>
+            <a:lvl5pPr>
+              <a:defRPr sz="2025" b="0">
+                <a:solidFill>
+                  <a:srgbClr val="526477"/>
+                </a:solidFill>
+                <a:latin typeface="Arial"/>
+                <a:ea typeface="Arial"/>
+                <a:cs typeface="Arial"/>
+              </a:defRPr>
+            </a:lvl5pPr>
+            <a:lvl6pPr>
+              <a:defRPr sz="2025" b="0">
+                <a:solidFill>
+                  <a:srgbClr val="526477"/>
+                </a:solidFill>
+                <a:latin typeface="Arial"/>
+                <a:ea typeface="Arial"/>
+                <a:cs typeface="Arial"/>
+              </a:defRPr>
+            </a:lvl6pPr>
+            <a:lvl7pPr>
+              <a:defRPr sz="2025" b="0">
+                <a:solidFill>
+                  <a:srgbClr val="526477"/>
+                </a:solidFill>
+                <a:latin typeface="Arial"/>
+                <a:ea typeface="Arial"/>
+                <a:cs typeface="Arial"/>
+              </a:defRPr>
+            </a:lvl7pPr>
+            <a:lvl8pPr>
+              <a:defRPr sz="2025" b="0">
+                <a:solidFill>
+                  <a:srgbClr val="526477"/>
+                </a:solidFill>
+                <a:latin typeface="Arial"/>
+                <a:ea typeface="Arial"/>
+                <a:cs typeface="Arial"/>
+              </a:defRPr>
+            </a:lvl8pPr>
+            <a:lvl9pPr>
+              <a:defRPr sz="2025" b="0">
+                <a:solidFill>
+                  <a:srgbClr val="526477"/>
+                </a:solidFill>
+                <a:latin typeface="Arial"/>
+                <a:ea typeface="Arial"/>
+                <a:cs typeface="Arial"/>
+              </a:defRPr>
+            </a:lvl9pPr>
+          </a:lstStyle>
+          <a:p xmlns:a="http://schemas.openxmlformats.org/drawingml/2006/main">
+            <a:pPr>
+              <a:defRPr sz="2025" b="0">
+                <a:solidFill>
+                  <a:srgbClr val="526477"/>
+                </a:solidFill>
+                <a:latin typeface="Arial"/>
+                <a:ea typeface="Arial"/>
+                <a:cs typeface="Arial"/>
+              </a:defRPr>
+            </a:pPr>
+            <a:r>
+              <a:rPr sz="2025" b="0">
+                <a:solidFill>
+                  <a:srgbClr val="526477"/>
+                </a:solidFill>
+                <a:latin typeface="Arial"/>
+                <a:ea typeface="Arial"/>
+                <a:cs typeface="Arial"/>
+              </a:rPr>
+              <a:t>$20,000 available, with no borrowing. Operate June 1–August 31, 2027. Rent is $2,500/month.</a:t>
+            </a:r>
+          </a:p>
+        </p:txBody>
+      </p:sp>
+      <p:sp>
+        <p:nvSpPr>
+          <p:cNvPr id="8" name="">
+            <a:extLst xmlns:a="http://schemas.openxmlformats.org/drawingml/2006/main">
+              <a:ext uri="{FF2B5EF4-FFF2-40B4-BE49-F238E27FC236}">
+                <a16:creationId xmlns:a16="http://schemas.microsoft.com/office/drawing/2014/main" id="{D4CA8633-88E2-46B9-965F-330F698C7935}"/>
+              </a:ext>
+            </a:extLst>
+          </p:cNvPr>
+          <p:cNvSpPr>
+            <a:spLocks xmlns:a="http://schemas.openxmlformats.org/drawingml/2006/main" noGrp="1"/>
+          </p:cNvSpPr>
+          <p:nvPr/>
+        </p:nvSpPr>
+        <p:spPr>
+          <a:xfrm xmlns:a="http://schemas.openxmlformats.org/drawingml/2006/main">
+            <a:off x="685800" y="4886325"/>
+            <a:ext cx="3429000" cy="400050"/>
+          </a:xfrm>
+          <a:prstGeom xmlns:a="http://schemas.openxmlformats.org/drawingml/2006/main" prst="rect">
+            <a:avLst/>
+          </a:prstGeom>
+          <a:noFill xmlns:a="http://schemas.openxmlformats.org/drawingml/2006/main"/>
+          <a:ln xmlns:a="http://schemas.openxmlformats.org/drawingml/2006/main" w="0">
+            <a:noFill/>
+          </a:ln>
+        </p:spPr>
+        <p:txBody>
+          <a:bodyPr xmlns:a="http://schemas.openxmlformats.org/drawingml/2006/main" wrap="square" lIns="0" tIns="0" rIns="0" bIns="0" anchor="t">
+            <a:noAutofit/>
+          </a:bodyPr>
+          <a:lstStyle xmlns:a="http://schemas.openxmlformats.org/drawingml/2006/main">
+            <a:defPPr>
+              <a:defRPr sz="2100" b="1">
+                <a:solidFill>
+                  <a:srgbClr val="16324F"/>
+                </a:solidFill>
+                <a:latin typeface="Arial"/>
+                <a:ea typeface="Arial"/>
+                <a:cs typeface="Arial"/>
+              </a:defRPr>
+            </a:defPPr>
+            <a:lvl1pPr>
+              <a:defRPr sz="2100" b="1">
+                <a:solidFill>
+                  <a:srgbClr val="16324F"/>
+                </a:solidFill>
+                <a:latin typeface="Arial"/>
+                <a:ea typeface="Arial"/>
+                <a:cs typeface="Arial"/>
+              </a:defRPr>
+            </a:lvl1pPr>
+            <a:lvl2pPr>
+              <a:defRPr sz="2100" b="1">
+                <a:solidFill>
+                  <a:srgbClr val="16324F"/>
+                </a:solidFill>
+                <a:latin typeface="Arial"/>
+                <a:ea typeface="Arial"/>
+                <a:cs typeface="Arial"/>
+              </a:defRPr>
+            </a:lvl2pPr>
+            <a:lvl3pPr>
+              <a:defRPr sz="2100" b="1">
+                <a:solidFill>
+                  <a:srgbClr val="16324F"/>
+                </a:solidFill>
+                <a:latin typeface="Arial"/>
+                <a:ea typeface="Arial"/>
+                <a:cs typeface="Arial"/>
+              </a:defRPr>
+            </a:lvl3pPr>
+            <a:lvl4pPr>
+              <a:defRPr sz="2100" b="1">
+                <a:solidFill>
+                  <a:srgbClr val="16324F"/>
+                </a:solidFill>
+                <a:latin typeface="Arial"/>
+                <a:ea typeface="Arial"/>
+                <a:cs typeface="Arial"/>
+              </a:defRPr>
+            </a:lvl4pPr>
+            <a:lvl5pPr>
+              <a:defRPr sz="2100" b="1">
+                <a:solidFill>
+                  <a:srgbClr val="16324F"/>
+                </a:solidFill>
+                <a:latin typeface="Arial"/>
+                <a:ea typeface="Arial"/>
+                <a:cs typeface="Arial"/>
+              </a:defRPr>
+            </a:lvl5pPr>
+            <a:lvl6pPr>
+              <a:defRPr sz="2100" b="1">
+                <a:solidFill>
+                  <a:srgbClr val="16324F"/>
+                </a:solidFill>
+                <a:latin typeface="Arial"/>
+                <a:ea typeface="Arial"/>
+                <a:cs typeface="Arial"/>
+              </a:defRPr>
+            </a:lvl6pPr>
+            <a:lvl7pPr>
+              <a:defRPr sz="2100" b="1">
+                <a:solidFill>
+                  <a:srgbClr val="16324F"/>
+                </a:solidFill>
+                <a:latin typeface="Arial"/>
+                <a:ea typeface="Arial"/>
+                <a:cs typeface="Arial"/>
+              </a:defRPr>
+            </a:lvl7pPr>
+            <a:lvl8pPr>
+              <a:defRPr sz="2100" b="1">
+                <a:solidFill>
+                  <a:srgbClr val="16324F"/>
+                </a:solidFill>
+                <a:latin typeface="Arial"/>
+                <a:ea typeface="Arial"/>
+                <a:cs typeface="Arial"/>
+              </a:defRPr>
+            </a:lvl8pPr>
+            <a:lvl9pPr>
+              <a:defRPr sz="2100" b="1">
+                <a:solidFill>
+                  <a:srgbClr val="16324F"/>
+                </a:solidFill>
+                <a:latin typeface="Arial"/>
+                <a:ea typeface="Arial"/>
+                <a:cs typeface="Arial"/>
+              </a:defRPr>
+            </a:lvl9pPr>
+          </a:lstStyle>
+          <a:p xmlns:a="http://schemas.openxmlformats.org/drawingml/2006/main">
+            <a:pPr>
+              <a:defRPr sz="2100" b="1">
+                <a:solidFill>
+                  <a:srgbClr val="16324F"/>
+                </a:solidFill>
+                <a:latin typeface="Arial"/>
+                <a:ea typeface="Arial"/>
+                <a:cs typeface="Arial"/>
+              </a:defRPr>
+            </a:pPr>
+            <a:r>
+              <a:rPr sz="2100" b="1">
+                <a:solidFill>
+                  <a:srgbClr val="16324F"/>
+                </a:solidFill>
+                <a:latin typeface="Arial"/>
+                <a:ea typeface="Arial"/>
+                <a:cs typeface="Arial"/>
+              </a:rPr>
+              <a:t>The decision to prove</a:t>
+            </a:r>
+          </a:p>
+        </p:txBody>
+      </p:sp>
+      <p:sp>
+        <p:nvSpPr>
+          <p:cNvPr id="9" name="">
+            <a:extLst xmlns:a="http://schemas.openxmlformats.org/drawingml/2006/main">
+              <a:ext uri="{FF2B5EF4-FFF2-40B4-BE49-F238E27FC236}">
+                <a16:creationId xmlns:a16="http://schemas.microsoft.com/office/drawing/2014/main" id="{E18A16DD-C3C0-4C4A-8F70-0E6B506425AF}"/>
+              </a:ext>
+            </a:extLst>
+          </p:cNvPr>
+          <p:cNvSpPr>
+            <a:spLocks xmlns:a="http://schemas.openxmlformats.org/drawingml/2006/main" noGrp="1"/>
+          </p:cNvSpPr>
+          <p:nvPr/>
+        </p:nvSpPr>
+        <p:spPr>
+          <a:xfrm xmlns:a="http://schemas.openxmlformats.org/drawingml/2006/main">
+            <a:off x="4286250" y="4886325"/>
+            <a:ext cx="7124700" cy="838200"/>
+          </a:xfrm>
+          <a:prstGeom xmlns:a="http://schemas.openxmlformats.org/drawingml/2006/main" prst="rect">
+            <a:avLst/>
+          </a:prstGeom>
+          <a:noFill xmlns:a="http://schemas.openxmlformats.org/drawingml/2006/main"/>
+          <a:ln xmlns:a="http://schemas.openxmlformats.org/drawingml/2006/main" w="0">
+            <a:noFill/>
+          </a:ln>
+        </p:spPr>
+        <p:txBody>
+          <a:bodyPr xmlns:a="http://schemas.openxmlformats.org/drawingml/2006/main" wrap="square" lIns="0" tIns="0" rIns="0" bIns="0" anchor="t">
+            <a:noAutofit/>
+          </a:bodyPr>
+          <a:lstStyle xmlns:a="http://schemas.openxmlformats.org/drawingml/2006/main">
+            <a:defPPr>
+              <a:defRPr sz="2025" b="0">
+                <a:solidFill>
+                  <a:srgbClr val="526477"/>
+                </a:solidFill>
+                <a:latin typeface="Arial"/>
+                <a:ea typeface="Arial"/>
+                <a:cs typeface="Arial"/>
+              </a:defRPr>
+            </a:defPPr>
+            <a:lvl1pPr>
+              <a:defRPr sz="2025" b="0">
+                <a:solidFill>
+                  <a:srgbClr val="526477"/>
+                </a:solidFill>
+                <a:latin typeface="Arial"/>
+                <a:ea typeface="Arial"/>
+                <a:cs typeface="Arial"/>
+              </a:defRPr>
+            </a:lvl1pPr>
+            <a:lvl2pPr>
+              <a:defRPr sz="2025" b="0">
+                <a:solidFill>
+                  <a:srgbClr val="526477"/>
+                </a:solidFill>
+                <a:latin typeface="Arial"/>
+                <a:ea typeface="Arial"/>
+                <a:cs typeface="Arial"/>
+              </a:defRPr>
+            </a:lvl2pPr>
+            <a:lvl3pPr>
+              <a:defRPr sz="2025" b="0">
+                <a:solidFill>
+                  <a:srgbClr val="526477"/>
+                </a:solidFill>
+                <a:latin typeface="Arial"/>
+                <a:ea typeface="Arial"/>
+                <a:cs typeface="Arial"/>
+              </a:defRPr>
+            </a:lvl3pPr>
+            <a:lvl4pPr>
+              <a:defRPr sz="2025" b="0">
+                <a:solidFill>
+                  <a:srgbClr val="526477"/>
+                </a:solidFill>
+                <a:latin typeface="Arial"/>
+                <a:ea typeface="Arial"/>
+                <a:cs typeface="Arial"/>
+              </a:defRPr>
+            </a:lvl4pPr>
+            <a:lvl5pPr>
+              <a:defRPr sz="2025" b="0">
+                <a:solidFill>
+                  <a:srgbClr val="526477"/>
+                </a:solidFill>
+                <a:latin typeface="Arial"/>
+                <a:ea typeface="Arial"/>
+                <a:cs typeface="Arial"/>
+              </a:defRPr>
+            </a:lvl5pPr>
+            <a:lvl6pPr>
+              <a:defRPr sz="2025" b="0">
+                <a:solidFill>
+                  <a:srgbClr val="526477"/>
+                </a:solidFill>
+                <a:latin typeface="Arial"/>
+                <a:ea typeface="Arial"/>
+                <a:cs typeface="Arial"/>
+              </a:defRPr>
+            </a:lvl6pPr>
+            <a:lvl7pPr>
+              <a:defRPr sz="2025" b="0">
+                <a:solidFill>
+                  <a:srgbClr val="526477"/>
+                </a:solidFill>
+                <a:latin typeface="Arial"/>
+                <a:ea typeface="Arial"/>
+                <a:cs typeface="Arial"/>
+              </a:defRPr>
+            </a:lvl7pPr>
+            <a:lvl8pPr>
+              <a:defRPr sz="2025" b="0">
+                <a:solidFill>
+                  <a:srgbClr val="526477"/>
+                </a:solidFill>
+                <a:latin typeface="Arial"/>
+                <a:ea typeface="Arial"/>
+                <a:cs typeface="Arial"/>
+              </a:defRPr>
+            </a:lvl8pPr>
+            <a:lvl9pPr>
+              <a:defRPr sz="2025" b="0">
+                <a:solidFill>
+                  <a:srgbClr val="526477"/>
+                </a:solidFill>
+                <a:latin typeface="Arial"/>
+                <a:ea typeface="Arial"/>
+                <a:cs typeface="Arial"/>
+              </a:defRPr>
+            </a:lvl9pPr>
+          </a:lstStyle>
+          <a:p xmlns:a="http://schemas.openxmlformats.org/drawingml/2006/main">
+            <a:pPr>
+              <a:defRPr sz="2025" b="0">
+                <a:solidFill>
+                  <a:srgbClr val="526477"/>
+                </a:solidFill>
+                <a:latin typeface="Arial"/>
+                <a:ea typeface="Arial"/>
+                <a:cs typeface="Arial"/>
+              </a:defRPr>
+            </a:pPr>
+            <a:r>
+              <a:rPr sz="2025" b="0">
+                <a:solidFill>
+                  <a:srgbClr val="526477"/>
+                </a:solidFill>
+                <a:latin typeface="Arial"/>
+                <a:ea typeface="Arial"/>
+                <a:cs typeface="Arial"/>
+              </a:rPr>
+              <a:t>Break even by month three while funding every expense. Base target: 1,926 sales, about 21/day.</a:t>
+            </a:r>
+          </a:p>
+        </p:txBody>
+      </p:sp>
+      <p:sp>
+        <p:nvSpPr>
+          <p:cNvPr id="10" name="">
+            <a:extLst xmlns:a="http://schemas.openxmlformats.org/drawingml/2006/main">
+              <a:ext uri="{FF2B5EF4-FFF2-40B4-BE49-F238E27FC236}">
+                <a16:creationId xmlns:a16="http://schemas.microsoft.com/office/drawing/2014/main" id="{9874B233-F2BB-436A-914D-56B2AE293745}"/>
+              </a:ext>
+            </a:extLst>
+          </p:cNvPr>
+          <p:cNvSpPr>
+            <a:spLocks xmlns:a="http://schemas.openxmlformats.org/drawingml/2006/main" noGrp="1"/>
+          </p:cNvSpPr>
+          <p:nvPr/>
+        </p:nvSpPr>
+        <p:spPr>
+          <a:xfrm xmlns:a="http://schemas.openxmlformats.org/drawingml/2006/main">
+            <a:off x="685800" y="6143625"/>
+            <a:ext cx="10620375" cy="304800"/>
+          </a:xfrm>
+          <a:prstGeom xmlns:a="http://schemas.openxmlformats.org/drawingml/2006/main" prst="rect">
+            <a:avLst/>
+          </a:prstGeom>
+          <a:noFill xmlns:a="http://schemas.openxmlformats.org/drawingml/2006/main"/>
+          <a:ln xmlns:a="http://schemas.openxmlformats.org/drawingml/2006/main" w="0">
+            <a:noFill/>
+          </a:ln>
+        </p:spPr>
+        <p:txBody>
+          <a:bodyPr xmlns:a="http://schemas.openxmlformats.org/drawingml/2006/main" wrap="square" lIns="0" tIns="0" rIns="0" bIns="0" anchor="t">
+            <a:noAutofit/>
+          </a:bodyPr>
+          <a:lstStyle xmlns:a="http://schemas.openxmlformats.org/drawingml/2006/main">
+            <a:defPPr>
+              <a:defRPr sz="1650" b="0">
+                <a:solidFill>
+                  <a:srgbClr val="B45309"/>
+                </a:solidFill>
+                <a:latin typeface="Arial"/>
+                <a:ea typeface="Arial"/>
+                <a:cs typeface="Arial"/>
+              </a:defRPr>
+            </a:defPPr>
+            <a:lvl1pPr>
+              <a:defRPr sz="1650" b="0">
+                <a:solidFill>
+                  <a:srgbClr val="B45309"/>
+                </a:solidFill>
+                <a:latin typeface="Arial"/>
+                <a:ea typeface="Arial"/>
+                <a:cs typeface="Arial"/>
+              </a:defRPr>
+            </a:lvl1pPr>
+            <a:lvl2pPr>
+              <a:defRPr sz="1650" b="0">
+                <a:solidFill>
+                  <a:srgbClr val="B45309"/>
+                </a:solidFill>
+                <a:latin typeface="Arial"/>
+                <a:ea typeface="Arial"/>
+                <a:cs typeface="Arial"/>
+              </a:defRPr>
+            </a:lvl2pPr>
+            <a:lvl3pPr>
+              <a:defRPr sz="1650" b="0">
+                <a:solidFill>
+                  <a:srgbClr val="B45309"/>
+                </a:solidFill>
+                <a:latin typeface="Arial"/>
+                <a:ea typeface="Arial"/>
+                <a:cs typeface="Arial"/>
+              </a:defRPr>
+            </a:lvl3pPr>
+            <a:lvl4pPr>
+              <a:defRPr sz="1650" b="0">
+                <a:solidFill>
+                  <a:srgbClr val="B45309"/>
+                </a:solidFill>
+                <a:latin typeface="Arial"/>
+                <a:ea typeface="Arial"/>
+                <a:cs typeface="Arial"/>
+              </a:defRPr>
+            </a:lvl4pPr>
+            <a:lvl5pPr>
+              <a:defRPr sz="1650" b="0">
+                <a:solidFill>
+                  <a:srgbClr val="B45309"/>
+                </a:solidFill>
+                <a:latin typeface="Arial"/>
+                <a:ea typeface="Arial"/>
+                <a:cs typeface="Arial"/>
+              </a:defRPr>
+            </a:lvl5pPr>
+            <a:lvl6pPr>
+              <a:defRPr sz="1650" b="0">
+                <a:solidFill>
+                  <a:srgbClr val="B45309"/>
+                </a:solidFill>
+                <a:latin typeface="Arial"/>
+                <a:ea typeface="Arial"/>
+                <a:cs typeface="Arial"/>
+              </a:defRPr>
+            </a:lvl6pPr>
+            <a:lvl7pPr>
+              <a:defRPr sz="1650" b="0">
+                <a:solidFill>
+                  <a:srgbClr val="B45309"/>
+                </a:solidFill>
+                <a:latin typeface="Arial"/>
+                <a:ea typeface="Arial"/>
+                <a:cs typeface="Arial"/>
+              </a:defRPr>
+            </a:lvl7pPr>
+            <a:lvl8pPr>
+              <a:defRPr sz="1650" b="0">
+                <a:solidFill>
+                  <a:srgbClr val="B45309"/>
+                </a:solidFill>
+                <a:latin typeface="Arial"/>
+                <a:ea typeface="Arial"/>
+                <a:cs typeface="Arial"/>
+              </a:defRPr>
+            </a:lvl8pPr>
+            <a:lvl9pPr>
+              <a:defRPr sz="1650" b="0">
+                <a:solidFill>
+                  <a:srgbClr val="B45309"/>
+                </a:solidFill>
+                <a:latin typeface="Arial"/>
+                <a:ea typeface="Arial"/>
+                <a:cs typeface="Arial"/>
+              </a:defRPr>
+            </a:lvl9pPr>
+          </a:lstStyle>
+          <a:p xmlns:a="http://schemas.openxmlformats.org/drawingml/2006/main">
+            <a:pPr>
+              <a:defRPr sz="1650" b="0">
+                <a:solidFill>
+                  <a:srgbClr val="B45309"/>
+                </a:solidFill>
+                <a:latin typeface="Arial"/>
+                <a:ea typeface="Arial"/>
+                <a:cs typeface="Arial"/>
+              </a:defRPr>
+            </a:pPr>
+            <a:r>
+              <a:rPr sz="1650" b="0">
+                <a:solidFill>
+                  <a:srgbClr val="B45309"/>
+                </a:solidFill>
+                <a:latin typeface="Arial"/>
+                <a:ea typeface="Arial"/>
+                <a:cs typeface="Arial"/>
+              </a:rPr>
+              <a:t>Key constraints: trade 10 AM–9 PM daily. August passing traffic is expected to decline 30%.</a:t>
+            </a:r>
+          </a:p>
+        </p:txBody>
+      </p:sp>
+      <p:sp>
+        <p:nvSpPr>
+          <p:cNvPr id="11" name="">
+            <a:extLst xmlns:a="http://schemas.openxmlformats.org/drawingml/2006/main">
+              <a:ext uri="{FF2B5EF4-FFF2-40B4-BE49-F238E27FC236}">
+                <a16:creationId xmlns:a16="http://schemas.microsoft.com/office/drawing/2014/main" id="{1078DBD4-4052-439A-AF0C-9D7B914C3E01}"/>
+              </a:ext>
+            </a:extLst>
+          </p:cNvPr>
+          <p:cNvSpPr>
+            <a:spLocks xmlns:a="http://schemas.openxmlformats.org/drawingml/2006/main" noGrp="1"/>
+          </p:cNvSpPr>
+          <p:nvPr/>
+        </p:nvSpPr>
+        <p:spPr>
+          <a:xfrm xmlns:a="http://schemas.openxmlformats.org/drawingml/2006/main">
+            <a:off x="11144250" y="6515100"/>
+            <a:ext cx="333375" cy="228600"/>
+          </a:xfrm>
+          <a:prstGeom xmlns:a="http://schemas.openxmlformats.org/drawingml/2006/main" prst="rect">
+            <a:avLst/>
+          </a:prstGeom>
+          <a:noFill xmlns:a="http://schemas.openxmlformats.org/drawingml/2006/main"/>
+          <a:ln xmlns:a="http://schemas.openxmlformats.org/drawingml/2006/main" w="0">
+            <a:noFill/>
+          </a:ln>
+        </p:spPr>
+        <p:txBody>
+          <a:bodyPr xmlns:a="http://schemas.openxmlformats.org/drawingml/2006/main" wrap="square" lIns="0" tIns="0" rIns="0" bIns="0" anchor="t">
+            <a:noAutofit/>
+          </a:bodyPr>
+          <a:lstStyle xmlns:a="http://schemas.openxmlformats.org/drawingml/2006/main">
+            <a:defPPr>
+              <a:defRPr sz="1200" b="0">
+                <a:solidFill>
+                  <a:srgbClr val="526477"/>
+                </a:solidFill>
+                <a:latin typeface="Arial"/>
+                <a:ea typeface="Arial"/>
+                <a:cs typeface="Arial"/>
+              </a:defRPr>
+            </a:defPPr>
+            <a:lvl1pPr>
+              <a:defRPr sz="1200" b="0">
+                <a:solidFill>
+                  <a:srgbClr val="526477"/>
+                </a:solidFill>
+                <a:latin typeface="Arial"/>
+                <a:ea typeface="Arial"/>
+                <a:cs typeface="Arial"/>
+              </a:defRPr>
+            </a:lvl1pPr>
+            <a:lvl2pPr>
+              <a:defRPr sz="1200" b="0">
+                <a:solidFill>
+                  <a:srgbClr val="526477"/>
+                </a:solidFill>
+                <a:latin typeface="Arial"/>
+                <a:ea typeface="Arial"/>
+                <a:cs typeface="Arial"/>
+              </a:defRPr>
+            </a:lvl2pPr>
+            <a:lvl3pPr>
+              <a:defRPr sz="1200" b="0">
+                <a:solidFill>
+                  <a:srgbClr val="526477"/>
+                </a:solidFill>
+                <a:latin typeface="Arial"/>
+                <a:ea typeface="Arial"/>
+                <a:cs typeface="Arial"/>
+              </a:defRPr>
+            </a:lvl3pPr>
+            <a:lvl4pPr>
+              <a:defRPr sz="1200" b="0">
+                <a:solidFill>
+                  <a:srgbClr val="526477"/>
+                </a:solidFill>
+                <a:latin typeface="Arial"/>
+                <a:ea typeface="Arial"/>
+                <a:cs typeface="Arial"/>
+              </a:defRPr>
+            </a:lvl4pPr>
+            <a:lvl5pPr>
+              <a:defRPr sz="1200" b="0">
+                <a:solidFill>
+                  <a:srgbClr val="526477"/>
+                </a:solidFill>
+                <a:latin typeface="Arial"/>
+                <a:ea typeface="Arial"/>
+                <a:cs typeface="Arial"/>
+              </a:defRPr>
+            </a:lvl5pPr>
+            <a:lvl6pPr>
+              <a:defRPr sz="1200" b="0">
+                <a:solidFill>
+                  <a:srgbClr val="526477"/>
+                </a:solidFill>
+                <a:latin typeface="Arial"/>
+                <a:ea typeface="Arial"/>
+                <a:cs typeface="Arial"/>
+              </a:defRPr>
+            </a:lvl6pPr>
+            <a:lvl7pPr>
+              <a:defRPr sz="1200" b="0">
+                <a:solidFill>
+                  <a:srgbClr val="526477"/>
+                </a:solidFill>
+                <a:latin typeface="Arial"/>
+                <a:ea typeface="Arial"/>
+                <a:cs typeface="Arial"/>
+              </a:defRPr>
+            </a:lvl7pPr>
+            <a:lvl8pPr>
+              <a:defRPr sz="1200" b="0">
+                <a:solidFill>
+                  <a:srgbClr val="526477"/>
+                </a:solidFill>
+                <a:latin typeface="Arial"/>
+                <a:ea typeface="Arial"/>
+                <a:cs typeface="Arial"/>
+              </a:defRPr>
+            </a:lvl8pPr>
+            <a:lvl9pPr>
+              <a:defRPr sz="1200" b="0">
+                <a:solidFill>
+                  <a:srgbClr val="526477"/>
+                </a:solidFill>
+                <a:latin typeface="Arial"/>
+                <a:ea typeface="Arial"/>
+                <a:cs typeface="Arial"/>
+              </a:defRPr>
+            </a:lvl9pPr>
+          </a:lstStyle>
+          <a:p xmlns:a="http://schemas.openxmlformats.org/drawingml/2006/main">
+            <a:pPr>
+              <a:defRPr sz="1200" b="0">
+                <a:solidFill>
+                  <a:srgbClr val="526477"/>
+                </a:solidFill>
+                <a:latin typeface="Arial"/>
+                <a:ea typeface="Arial"/>
+                <a:cs typeface="Arial"/>
+              </a:defRPr>
+            </a:pPr>
+            <a:r>
+              <a:rPr sz="1200" b="0">
+                <a:solidFill>
+                  <a:srgbClr val="526477"/>
+                </a:solidFill>
+                <a:latin typeface="Arial"/>
+                <a:ea typeface="Arial"/>
+                <a:cs typeface="Arial"/>
+              </a:rPr>
+              <a:t>2</a:t>
+            </a:r>
+          </a:p>
+        </p:txBody>
+      </p:sp>
+    </p:spTree>
+    <p:extLst>
+      <p:ext uri="{BB962C8B-B14F-4D97-AF65-F5344CB8AC3E}">
+        <p14:creationId xmlns:p14="http://schemas.microsoft.com/office/powerpoint/2010/main" val="1402364784"/>
+      </p:ext>
+    </p:extLst>
+  </p:cSld>
+</p:sld>
+</file>
+
+<file path=ppt/slides/slide3.xml><?xml version="1.0" encoding="utf-8"?>
 <p:sld xmlns:a="http://schemas.openxmlformats.org/drawingml/2006/main" xmlns:r="http://schemas.openxmlformats.org/officeDocument/2006/relationships" xmlns:p="http://schemas.openxmlformats.org/presentationml/2006/main">
   <p:cSld>
     <p:bg>
@@ -6534,7 +8395,7 @@
 </p:sld>
 </file>
 
-<file path=ppt/slides/slide3.xml><?xml version="1.0" encoding="utf-8"?>
+<file path=ppt/slides/slide4.xml><?xml version="1.0" encoding="utf-8"?>
 <p:sld xmlns:a="http://schemas.openxmlformats.org/drawingml/2006/main" xmlns:r="http://schemas.openxmlformats.org/officeDocument/2006/relationships" xmlns:p="http://schemas.openxmlformats.org/presentationml/2006/main">
   <p:cSld>
     <p:bg>
@@ -8608,7 +10469,7 @@
 </p:sld>
 </file>
 
-<file path=ppt/slides/slide4.xml><?xml version="1.0" encoding="utf-8"?>
+<file path=ppt/slides/slide5.xml><?xml version="1.0" encoding="utf-8"?>
 <p:sld xmlns:a="http://schemas.openxmlformats.org/drawingml/2006/main" xmlns:r="http://schemas.openxmlformats.org/officeDocument/2006/relationships" xmlns:p="http://schemas.openxmlformats.org/presentationml/2006/main">
   <p:cSld>
     <p:bg>
@@ -9774,7 +11635,7 @@
 </p:sld>
 </file>
 
-<file path=ppt/slides/slide5.xml><?xml version="1.0" encoding="utf-8"?>
+<file path=ppt/slides/slide6.xml><?xml version="1.0" encoding="utf-8"?>
 <p:sld xmlns:a="http://schemas.openxmlformats.org/drawingml/2006/main" xmlns:r="http://schemas.openxmlformats.org/officeDocument/2006/relationships" xmlns:p="http://schemas.openxmlformats.org/presentationml/2006/main">
   <p:cSld>
     <p:bg>
@@ -10988,7 +12849,7 @@
 </p:sld>
 </file>
 
-<file path=ppt/slides/slide6.xml><?xml version="1.0" encoding="utf-8"?>
+<file path=ppt/slides/slide7.xml><?xml version="1.0" encoding="utf-8"?>
 <p:sld xmlns:a="http://schemas.openxmlformats.org/drawingml/2006/main" xmlns:r="http://schemas.openxmlformats.org/officeDocument/2006/relationships" xmlns:p="http://schemas.openxmlformats.org/presentationml/2006/main">
   <p:cSld>
     <p:bg>
@@ -12154,7 +14015,7 @@
 </p:sld>
 </file>
 
-<file path=ppt/slides/slide7.xml><?xml version="1.0" encoding="utf-8"?>
+<file path=ppt/slides/slide8.xml><?xml version="1.0" encoding="utf-8"?>
 <p:sld xmlns:a="http://schemas.openxmlformats.org/drawingml/2006/main" xmlns:r="http://schemas.openxmlformats.org/officeDocument/2006/relationships" xmlns:p="http://schemas.openxmlformats.org/presentationml/2006/main">
   <p:cSld>
     <p:bg>
